--- a/biotrain-2025/Getting-Programming-Help_2025.pptx
+++ b/biotrain-2025/Getting-Programming-Help_2025.pptx
@@ -12,12 +12,12 @@
     <p:sldId id="632" r:id="rId3"/>
     <p:sldId id="634" r:id="rId4"/>
     <p:sldId id="637" r:id="rId5"/>
-    <p:sldId id="638" r:id="rId6"/>
-    <p:sldId id="639" r:id="rId7"/>
+    <p:sldId id="639" r:id="rId6"/>
+    <p:sldId id="638" r:id="rId7"/>
     <p:sldId id="640" r:id="rId8"/>
-    <p:sldId id="641" r:id="rId9"/>
-    <p:sldId id="633" r:id="rId10"/>
-    <p:sldId id="635" r:id="rId11"/>
+    <p:sldId id="643" r:id="rId9"/>
+    <p:sldId id="641" r:id="rId10"/>
+    <p:sldId id="633" r:id="rId11"/>
     <p:sldId id="620" r:id="rId12"/>
   </p:sldIdLst>
   <p:sldSz cx="12192000" cy="6858000"/>
@@ -218,7 +218,7 @@
           <a:p>
             <a:fld id="{85EC26B4-5EFE-4A48-A742-8B1A2420BA72}" type="datetimeFigureOut">
               <a:rPr lang="en-US" smtClean="0"/>
-              <a:t>5/19/22</a:t>
+              <a:t>5/23/25</a:t>
             </a:fld>
             <a:endParaRPr lang="en-US"/>
           </a:p>
@@ -3614,7 +3614,7 @@
           <p:cNvPr id="2" name="Title 1">
             <a:extLst>
               <a:ext uri="{FF2B5EF4-FFF2-40B4-BE49-F238E27FC236}">
-                <a16:creationId xmlns:a16="http://schemas.microsoft.com/office/drawing/2014/main" id="{22F81692-49F5-E442-91F8-D5A9B230DF8D}"/>
+                <a16:creationId xmlns:a16="http://schemas.microsoft.com/office/drawing/2014/main" id="{ADBFFA3F-FB02-0349-A0BA-51E0F4C81862}"/>
               </a:ext>
             </a:extLst>
           </p:cNvPr>
@@ -3632,7 +3632,180 @@
           <a:p>
             <a:r>
               <a:rPr lang="en-US" dirty="0"/>
-              <a:t>Sometimes asking the question out loud helps you solve the problem</a:t>
+              <a:t>An asking-for-help script</a:t>
+            </a:r>
+          </a:p>
+        </p:txBody>
+      </p:sp>
+      <p:sp>
+        <p:nvSpPr>
+          <p:cNvPr id="3" name="Content Placeholder 2">
+            <a:extLst>
+              <a:ext uri="{FF2B5EF4-FFF2-40B4-BE49-F238E27FC236}">
+                <a16:creationId xmlns:a16="http://schemas.microsoft.com/office/drawing/2014/main" id="{F6F4CDAA-2445-2F4B-BBE0-DF06116F4985}"/>
+              </a:ext>
+            </a:extLst>
+          </p:cNvPr>
+          <p:cNvSpPr>
+            <a:spLocks noGrp="1"/>
+          </p:cNvSpPr>
+          <p:nvPr>
+            <p:ph idx="1"/>
+          </p:nvPr>
+        </p:nvSpPr>
+        <p:spPr>
+          <a:xfrm>
+            <a:off x="609600" y="1039858"/>
+            <a:ext cx="10972800" cy="5086305"/>
+          </a:xfrm>
+        </p:spPr>
+        <p:txBody>
+          <a:bodyPr/>
+          <a:lstStyle/>
+          <a:p>
+            <a:pPr marL="0" indent="0">
+              <a:buNone/>
+            </a:pPr>
+            <a:r>
+              <a:rPr lang="en-US" dirty="0"/>
+              <a:t>My overall goal is to: </a:t>
+            </a:r>
+            <a:r>
+              <a:rPr lang="en-US" u="sng" dirty="0"/>
+              <a:t>clean up clutter in my home directory</a:t>
+            </a:r>
+            <a:r>
+              <a:rPr lang="en-US" dirty="0"/>
+              <a:t>.</a:t>
+            </a:r>
+          </a:p>
+          <a:p>
+            <a:pPr marL="0" indent="0">
+              <a:buNone/>
+            </a:pPr>
+            <a:r>
+              <a:rPr lang="en-US" dirty="0"/>
+              <a:t>I’m trying to: </a:t>
+            </a:r>
+            <a:r>
+              <a:rPr lang="en-US" u="sng" dirty="0"/>
+              <a:t>remove the directory </a:t>
+            </a:r>
+            <a:r>
+              <a:rPr lang="en-US" u="sng" dirty="0" err="1"/>
+              <a:t>TemporaryFiles</a:t>
+            </a:r>
+            <a:r>
+              <a:rPr lang="en-US" u="sng" dirty="0"/>
+              <a:t>.</a:t>
+            </a:r>
+          </a:p>
+          <a:p>
+            <a:pPr marL="0" indent="0">
+              <a:buNone/>
+            </a:pPr>
+            <a:r>
+              <a:rPr lang="en-US" dirty="0"/>
+              <a:t>I tried: </a:t>
+            </a:r>
+            <a:r>
+              <a:rPr lang="en-US" u="sng" dirty="0" err="1">
+                <a:latin typeface="Courier New" panose="02070309020205020404" pitchFamily="49" charset="0"/>
+                <a:cs typeface="Courier New" panose="02070309020205020404" pitchFamily="49" charset="0"/>
+              </a:rPr>
+              <a:t>rm</a:t>
+            </a:r>
+            <a:r>
+              <a:rPr lang="en-US" u="sng" dirty="0">
+                <a:latin typeface="Courier New" panose="02070309020205020404" pitchFamily="49" charset="0"/>
+                <a:cs typeface="Courier New" panose="02070309020205020404" pitchFamily="49" charset="0"/>
+              </a:rPr>
+              <a:t> </a:t>
+            </a:r>
+            <a:r>
+              <a:rPr lang="en-US" u="sng" dirty="0" err="1">
+                <a:latin typeface="Courier New" panose="02070309020205020404" pitchFamily="49" charset="0"/>
+                <a:cs typeface="Courier New" panose="02070309020205020404" pitchFamily="49" charset="0"/>
+              </a:rPr>
+              <a:t>TemporaryFiles</a:t>
+            </a:r>
+            <a:endParaRPr lang="en-US" u="sng" dirty="0">
+              <a:latin typeface="Courier New" panose="02070309020205020404" pitchFamily="49" charset="0"/>
+              <a:cs typeface="Courier New" panose="02070309020205020404" pitchFamily="49" charset="0"/>
+            </a:endParaRPr>
+          </a:p>
+          <a:p>
+            <a:pPr marL="0" indent="0">
+              <a:buNone/>
+            </a:pPr>
+            <a:r>
+              <a:rPr lang="en-US" dirty="0">
+                <a:cs typeface="Courier New" panose="02070309020205020404" pitchFamily="49" charset="0"/>
+              </a:rPr>
+              <a:t>I expected: </a:t>
+            </a:r>
+            <a:r>
+              <a:rPr lang="en-US" u="sng" dirty="0" err="1">
+                <a:cs typeface="Courier New" panose="02070309020205020404" pitchFamily="49" charset="0"/>
+              </a:rPr>
+              <a:t>TemporaryFiles</a:t>
+            </a:r>
+            <a:r>
+              <a:rPr lang="en-US" u="sng" dirty="0">
+                <a:cs typeface="Courier New" panose="02070309020205020404" pitchFamily="49" charset="0"/>
+              </a:rPr>
+              <a:t> would immediately go away</a:t>
+            </a:r>
+          </a:p>
+          <a:p>
+            <a:pPr marL="0" indent="0">
+              <a:buNone/>
+            </a:pPr>
+            <a:r>
+              <a:rPr lang="en-US" dirty="0">
+                <a:cs typeface="Courier New" panose="02070309020205020404" pitchFamily="49" charset="0"/>
+              </a:rPr>
+              <a:t>But instead:</a:t>
+            </a:r>
+          </a:p>
+          <a:p>
+            <a:r>
+              <a:rPr lang="en-US" dirty="0">
+                <a:cs typeface="Courier New" panose="02070309020205020404" pitchFamily="49" charset="0"/>
+              </a:rPr>
+              <a:t>I got an error message: </a:t>
+            </a:r>
+            <a:r>
+              <a:rPr lang="en-US" u="sng" dirty="0" err="1">
+                <a:cs typeface="Courier New" panose="02070309020205020404" pitchFamily="49" charset="0"/>
+              </a:rPr>
+              <a:t>rm</a:t>
+            </a:r>
+            <a:r>
+              <a:rPr lang="en-US" u="sng" dirty="0">
+                <a:cs typeface="Courier New" panose="02070309020205020404" pitchFamily="49" charset="0"/>
+              </a:rPr>
+              <a:t>: </a:t>
+            </a:r>
+            <a:r>
+              <a:rPr lang="en-US" u="sng" dirty="0" err="1">
+                <a:cs typeface="Courier New" panose="02070309020205020404" pitchFamily="49" charset="0"/>
+              </a:rPr>
+              <a:t>TemporaryFiles</a:t>
+            </a:r>
+            <a:r>
+              <a:rPr lang="en-US" u="sng" dirty="0">
+                <a:cs typeface="Courier New" panose="02070309020205020404" pitchFamily="49" charset="0"/>
+              </a:rPr>
+              <a:t> is a directory</a:t>
+            </a:r>
+          </a:p>
+          <a:p>
+            <a:r>
+              <a:rPr lang="en-US" dirty="0">
+                <a:cs typeface="Courier New" panose="02070309020205020404" pitchFamily="49" charset="0"/>
+              </a:rPr>
+              <a:t>Something unexpected happened: ____________</a:t>
             </a:r>
           </a:p>
         </p:txBody>
@@ -3642,7 +3815,7 @@
           <p:cNvPr id="4" name="Slide Number Placeholder 3">
             <a:extLst>
               <a:ext uri="{FF2B5EF4-FFF2-40B4-BE49-F238E27FC236}">
-                <a16:creationId xmlns:a16="http://schemas.microsoft.com/office/drawing/2014/main" id="{558F0B56-DE57-1841-815F-7D3E4762EF2A}"/>
+                <a16:creationId xmlns:a16="http://schemas.microsoft.com/office/drawing/2014/main" id="{0347FC39-F3EA-8C45-AB19-B6360EFA590E}"/>
               </a:ext>
             </a:extLst>
           </p:cNvPr>
@@ -3666,63 +3839,389 @@
           </a:p>
         </p:txBody>
       </p:sp>
-      <p:pic>
-        <p:nvPicPr>
-          <p:cNvPr id="1026" name="Picture 2" descr="Image result for rubber duck">
-            <a:extLst>
-              <a:ext uri="{FF2B5EF4-FFF2-40B4-BE49-F238E27FC236}">
-                <a16:creationId xmlns:a16="http://schemas.microsoft.com/office/drawing/2014/main" id="{E5ECCBA0-5FF0-FA4D-940C-CC53F4D0283D}"/>
-              </a:ext>
-            </a:extLst>
-          </p:cNvPr>
-          <p:cNvPicPr>
-            <a:picLocks noChangeAspect="1" noChangeArrowheads="1"/>
-          </p:cNvPicPr>
-          <p:nvPr/>
-        </p:nvPicPr>
-        <p:blipFill>
-          <a:blip r:embed="rId2">
-            <a:extLst>
-              <a:ext uri="{28A0092B-C50C-407E-A947-70E740481C1C}">
-                <a14:useLocalDpi xmlns:a14="http://schemas.microsoft.com/office/drawing/2010/main"/>
-              </a:ext>
-            </a:extLst>
-          </a:blip>
-          <a:srcRect/>
-          <a:stretch>
-            <a:fillRect/>
-          </a:stretch>
-        </p:blipFill>
-        <p:spPr bwMode="auto">
-          <a:xfrm>
-            <a:off x="2709051" y="601239"/>
-            <a:ext cx="6493451" cy="5595892"/>
-          </a:xfrm>
-          <a:prstGeom prst="rect">
-            <a:avLst/>
-          </a:prstGeom>
-          <a:noFill/>
-          <a:extLst>
-            <a:ext uri="{909E8E84-426E-40DD-AFC4-6F175D3DCCD1}">
-              <a14:hiddenFill xmlns:a14="http://schemas.microsoft.com/office/drawing/2010/main">
-                <a:solidFill>
-                  <a:srgbClr val="FFFFFF"/>
-                </a:solidFill>
-              </a14:hiddenFill>
-            </a:ext>
-          </a:extLst>
-        </p:spPr>
-      </p:pic>
     </p:spTree>
     <p:extLst>
       <p:ext uri="{BB962C8B-B14F-4D97-AF65-F5344CB8AC3E}">
-        <p14:creationId xmlns:p14="http://schemas.microsoft.com/office/powerpoint/2010/main" val="211558527"/>
+        <p14:creationId xmlns:p14="http://schemas.microsoft.com/office/powerpoint/2010/main" val="2166275785"/>
       </p:ext>
     </p:extLst>
   </p:cSld>
   <p:clrMapOvr>
     <a:masterClrMapping/>
   </p:clrMapOvr>
+  <p:timing>
+    <p:tnLst>
+      <p:par>
+        <p:cTn id="1" dur="indefinite" restart="never" nodeType="tmRoot">
+          <p:childTnLst>
+            <p:seq concurrent="1" nextAc="seek">
+              <p:cTn id="2" dur="indefinite" nodeType="mainSeq">
+                <p:childTnLst>
+                  <p:par>
+                    <p:cTn id="3" fill="hold">
+                      <p:stCondLst>
+                        <p:cond delay="indefinite"/>
+                      </p:stCondLst>
+                      <p:childTnLst>
+                        <p:par>
+                          <p:cTn id="4" fill="hold">
+                            <p:stCondLst>
+                              <p:cond delay="0"/>
+                            </p:stCondLst>
+                            <p:childTnLst>
+                              <p:par>
+                                <p:cTn id="5" presetID="1" presetClass="entr" presetSubtype="0" fill="hold" nodeType="clickEffect">
+                                  <p:stCondLst>
+                                    <p:cond delay="0"/>
+                                  </p:stCondLst>
+                                  <p:childTnLst>
+                                    <p:set>
+                                      <p:cBhvr>
+                                        <p:cTn id="6" dur="1" fill="hold">
+                                          <p:stCondLst>
+                                            <p:cond delay="0"/>
+                                          </p:stCondLst>
+                                        </p:cTn>
+                                        <p:tgtEl>
+                                          <p:spTgt spid="3">
+                                            <p:txEl>
+                                              <p:pRg st="0" end="0"/>
+                                            </p:txEl>
+                                          </p:spTgt>
+                                        </p:tgtEl>
+                                        <p:attrNameLst>
+                                          <p:attrName>style.visibility</p:attrName>
+                                        </p:attrNameLst>
+                                      </p:cBhvr>
+                                      <p:to>
+                                        <p:strVal val="visible"/>
+                                      </p:to>
+                                    </p:set>
+                                  </p:childTnLst>
+                                </p:cTn>
+                              </p:par>
+                            </p:childTnLst>
+                          </p:cTn>
+                        </p:par>
+                      </p:childTnLst>
+                    </p:cTn>
+                  </p:par>
+                  <p:par>
+                    <p:cTn id="7" fill="hold">
+                      <p:stCondLst>
+                        <p:cond delay="indefinite"/>
+                      </p:stCondLst>
+                      <p:childTnLst>
+                        <p:par>
+                          <p:cTn id="8" fill="hold">
+                            <p:stCondLst>
+                              <p:cond delay="0"/>
+                            </p:stCondLst>
+                            <p:childTnLst>
+                              <p:par>
+                                <p:cTn id="9" presetID="1" presetClass="entr" presetSubtype="0" fill="hold" nodeType="clickEffect">
+                                  <p:stCondLst>
+                                    <p:cond delay="0"/>
+                                  </p:stCondLst>
+                                  <p:childTnLst>
+                                    <p:set>
+                                      <p:cBhvr>
+                                        <p:cTn id="10" dur="1" fill="hold">
+                                          <p:stCondLst>
+                                            <p:cond delay="0"/>
+                                          </p:stCondLst>
+                                        </p:cTn>
+                                        <p:tgtEl>
+                                          <p:spTgt spid="3">
+                                            <p:txEl>
+                                              <p:pRg st="1" end="1"/>
+                                            </p:txEl>
+                                          </p:spTgt>
+                                        </p:tgtEl>
+                                        <p:attrNameLst>
+                                          <p:attrName>style.visibility</p:attrName>
+                                        </p:attrNameLst>
+                                      </p:cBhvr>
+                                      <p:to>
+                                        <p:strVal val="visible"/>
+                                      </p:to>
+                                    </p:set>
+                                  </p:childTnLst>
+                                </p:cTn>
+                              </p:par>
+                            </p:childTnLst>
+                          </p:cTn>
+                        </p:par>
+                      </p:childTnLst>
+                    </p:cTn>
+                  </p:par>
+                  <p:par>
+                    <p:cTn id="11" fill="hold">
+                      <p:stCondLst>
+                        <p:cond delay="indefinite"/>
+                      </p:stCondLst>
+                      <p:childTnLst>
+                        <p:par>
+                          <p:cTn id="12" fill="hold">
+                            <p:stCondLst>
+                              <p:cond delay="0"/>
+                            </p:stCondLst>
+                            <p:childTnLst>
+                              <p:par>
+                                <p:cTn id="13" presetID="1" presetClass="entr" presetSubtype="0" fill="hold" nodeType="clickEffect">
+                                  <p:stCondLst>
+                                    <p:cond delay="0"/>
+                                  </p:stCondLst>
+                                  <p:childTnLst>
+                                    <p:set>
+                                      <p:cBhvr>
+                                        <p:cTn id="14" dur="1" fill="hold">
+                                          <p:stCondLst>
+                                            <p:cond delay="0"/>
+                                          </p:stCondLst>
+                                        </p:cTn>
+                                        <p:tgtEl>
+                                          <p:spTgt spid="3">
+                                            <p:txEl>
+                                              <p:pRg st="2" end="2"/>
+                                            </p:txEl>
+                                          </p:spTgt>
+                                        </p:tgtEl>
+                                        <p:attrNameLst>
+                                          <p:attrName>style.visibility</p:attrName>
+                                        </p:attrNameLst>
+                                      </p:cBhvr>
+                                      <p:to>
+                                        <p:strVal val="visible"/>
+                                      </p:to>
+                                    </p:set>
+                                  </p:childTnLst>
+                                </p:cTn>
+                              </p:par>
+                            </p:childTnLst>
+                          </p:cTn>
+                        </p:par>
+                      </p:childTnLst>
+                    </p:cTn>
+                  </p:par>
+                  <p:par>
+                    <p:cTn id="15" fill="hold">
+                      <p:stCondLst>
+                        <p:cond delay="indefinite"/>
+                      </p:stCondLst>
+                      <p:childTnLst>
+                        <p:par>
+                          <p:cTn id="16" fill="hold">
+                            <p:stCondLst>
+                              <p:cond delay="0"/>
+                            </p:stCondLst>
+                            <p:childTnLst>
+                              <p:par>
+                                <p:cTn id="17" presetID="1" presetClass="entr" presetSubtype="0" fill="hold" nodeType="clickEffect">
+                                  <p:stCondLst>
+                                    <p:cond delay="0"/>
+                                  </p:stCondLst>
+                                  <p:childTnLst>
+                                    <p:set>
+                                      <p:cBhvr>
+                                        <p:cTn id="18" dur="1" fill="hold">
+                                          <p:stCondLst>
+                                            <p:cond delay="0"/>
+                                          </p:stCondLst>
+                                        </p:cTn>
+                                        <p:tgtEl>
+                                          <p:spTgt spid="3">
+                                            <p:txEl>
+                                              <p:pRg st="3" end="3"/>
+                                            </p:txEl>
+                                          </p:spTgt>
+                                        </p:tgtEl>
+                                        <p:attrNameLst>
+                                          <p:attrName>style.visibility</p:attrName>
+                                        </p:attrNameLst>
+                                      </p:cBhvr>
+                                      <p:to>
+                                        <p:strVal val="visible"/>
+                                      </p:to>
+                                    </p:set>
+                                  </p:childTnLst>
+                                </p:cTn>
+                              </p:par>
+                            </p:childTnLst>
+                          </p:cTn>
+                        </p:par>
+                      </p:childTnLst>
+                    </p:cTn>
+                  </p:par>
+                  <p:par>
+                    <p:cTn id="19" fill="hold">
+                      <p:stCondLst>
+                        <p:cond delay="indefinite"/>
+                      </p:stCondLst>
+                      <p:childTnLst>
+                        <p:par>
+                          <p:cTn id="20" fill="hold">
+                            <p:stCondLst>
+                              <p:cond delay="0"/>
+                            </p:stCondLst>
+                            <p:childTnLst>
+                              <p:par>
+                                <p:cTn id="21" presetID="1" presetClass="entr" presetSubtype="0" fill="hold" nodeType="clickEffect">
+                                  <p:stCondLst>
+                                    <p:cond delay="0"/>
+                                  </p:stCondLst>
+                                  <p:childTnLst>
+                                    <p:set>
+                                      <p:cBhvr>
+                                        <p:cTn id="22" dur="1" fill="hold">
+                                          <p:stCondLst>
+                                            <p:cond delay="0"/>
+                                          </p:stCondLst>
+                                        </p:cTn>
+                                        <p:tgtEl>
+                                          <p:spTgt spid="3">
+                                            <p:txEl>
+                                              <p:pRg st="4" end="4"/>
+                                            </p:txEl>
+                                          </p:spTgt>
+                                        </p:tgtEl>
+                                        <p:attrNameLst>
+                                          <p:attrName>style.visibility</p:attrName>
+                                        </p:attrNameLst>
+                                      </p:cBhvr>
+                                      <p:to>
+                                        <p:strVal val="visible"/>
+                                      </p:to>
+                                    </p:set>
+                                  </p:childTnLst>
+                                </p:cTn>
+                              </p:par>
+                            </p:childTnLst>
+                          </p:cTn>
+                        </p:par>
+                      </p:childTnLst>
+                    </p:cTn>
+                  </p:par>
+                  <p:par>
+                    <p:cTn id="23" fill="hold">
+                      <p:stCondLst>
+                        <p:cond delay="indefinite"/>
+                      </p:stCondLst>
+                      <p:childTnLst>
+                        <p:par>
+                          <p:cTn id="24" fill="hold">
+                            <p:stCondLst>
+                              <p:cond delay="0"/>
+                            </p:stCondLst>
+                            <p:childTnLst>
+                              <p:par>
+                                <p:cTn id="25" presetID="1" presetClass="entr" presetSubtype="0" fill="hold" nodeType="clickEffect">
+                                  <p:stCondLst>
+                                    <p:cond delay="0"/>
+                                  </p:stCondLst>
+                                  <p:childTnLst>
+                                    <p:set>
+                                      <p:cBhvr>
+                                        <p:cTn id="26" dur="1" fill="hold">
+                                          <p:stCondLst>
+                                            <p:cond delay="0"/>
+                                          </p:stCondLst>
+                                        </p:cTn>
+                                        <p:tgtEl>
+                                          <p:spTgt spid="3">
+                                            <p:txEl>
+                                              <p:pRg st="5" end="5"/>
+                                            </p:txEl>
+                                          </p:spTgt>
+                                        </p:tgtEl>
+                                        <p:attrNameLst>
+                                          <p:attrName>style.visibility</p:attrName>
+                                        </p:attrNameLst>
+                                      </p:cBhvr>
+                                      <p:to>
+                                        <p:strVal val="visible"/>
+                                      </p:to>
+                                    </p:set>
+                                  </p:childTnLst>
+                                </p:cTn>
+                              </p:par>
+                            </p:childTnLst>
+                          </p:cTn>
+                        </p:par>
+                      </p:childTnLst>
+                    </p:cTn>
+                  </p:par>
+                  <p:par>
+                    <p:cTn id="27" fill="hold">
+                      <p:stCondLst>
+                        <p:cond delay="indefinite"/>
+                      </p:stCondLst>
+                      <p:childTnLst>
+                        <p:par>
+                          <p:cTn id="28" fill="hold">
+                            <p:stCondLst>
+                              <p:cond delay="0"/>
+                            </p:stCondLst>
+                            <p:childTnLst>
+                              <p:par>
+                                <p:cTn id="29" presetID="1" presetClass="entr" presetSubtype="0" fill="hold" nodeType="clickEffect">
+                                  <p:stCondLst>
+                                    <p:cond delay="0"/>
+                                  </p:stCondLst>
+                                  <p:childTnLst>
+                                    <p:set>
+                                      <p:cBhvr>
+                                        <p:cTn id="30" dur="1" fill="hold">
+                                          <p:stCondLst>
+                                            <p:cond delay="0"/>
+                                          </p:stCondLst>
+                                        </p:cTn>
+                                        <p:tgtEl>
+                                          <p:spTgt spid="3">
+                                            <p:txEl>
+                                              <p:pRg st="6" end="6"/>
+                                            </p:txEl>
+                                          </p:spTgt>
+                                        </p:tgtEl>
+                                        <p:attrNameLst>
+                                          <p:attrName>style.visibility</p:attrName>
+                                        </p:attrNameLst>
+                                      </p:cBhvr>
+                                      <p:to>
+                                        <p:strVal val="visible"/>
+                                      </p:to>
+                                    </p:set>
+                                  </p:childTnLst>
+                                </p:cTn>
+                              </p:par>
+                            </p:childTnLst>
+                          </p:cTn>
+                        </p:par>
+                      </p:childTnLst>
+                    </p:cTn>
+                  </p:par>
+                </p:childTnLst>
+              </p:cTn>
+              <p:prevCondLst>
+                <p:cond evt="onPrev" delay="0">
+                  <p:tgtEl>
+                    <p:sldTgt/>
+                  </p:tgtEl>
+                </p:cond>
+              </p:prevCondLst>
+              <p:nextCondLst>
+                <p:cond evt="onNext" delay="0">
+                  <p:tgtEl>
+                    <p:sldTgt/>
+                  </p:tgtEl>
+                </p:cond>
+              </p:nextCondLst>
+            </p:seq>
+          </p:childTnLst>
+        </p:cTn>
+      </p:par>
+    </p:tnLst>
+  </p:timing>
 </p:sld>
 </file>
 
@@ -3996,7 +4495,9 @@
         </p:nvSpPr>
         <p:spPr/>
         <p:txBody>
-          <a:bodyPr/>
+          <a:bodyPr>
+            <a:normAutofit lnSpcReduction="10000"/>
+          </a:bodyPr>
           <a:lstStyle/>
           <a:p>
             <a:r>
@@ -4037,6 +4538,13 @@
             <a:r>
               <a:rPr lang="en-US" dirty="0"/>
               <a:t>Google your question / error message</a:t>
+            </a:r>
+          </a:p>
+          <a:p>
+            <a:pPr lvl="1"/>
+            <a:r>
+              <a:rPr lang="en-US" dirty="0"/>
+              <a:t>Use ChatGPT (or other AI)</a:t>
             </a:r>
           </a:p>
           <a:p>
@@ -4554,6 +5062,55 @@
                       </p:childTnLst>
                     </p:cTn>
                   </p:par>
+                  <p:par>
+                    <p:cTn id="39" fill="hold">
+                      <p:stCondLst>
+                        <p:cond delay="indefinite"/>
+                      </p:stCondLst>
+                      <p:childTnLst>
+                        <p:par>
+                          <p:cTn id="40" fill="hold">
+                            <p:stCondLst>
+                              <p:cond delay="0"/>
+                            </p:stCondLst>
+                            <p:childTnLst>
+                              <p:par>
+                                <p:cTn id="41" presetID="1" presetClass="entr" presetSubtype="0" fill="hold" nodeType="clickEffect">
+                                  <p:stCondLst>
+                                    <p:cond delay="0"/>
+                                  </p:stCondLst>
+                                  <p:childTnLst>
+                                    <p:set>
+                                      <p:cBhvr>
+                                        <p:cTn id="42" dur="1" fill="hold">
+                                          <p:stCondLst>
+                                            <p:cond delay="0"/>
+                                          </p:stCondLst>
+                                        </p:cTn>
+                                        <p:tgtEl>
+                                          <p:spTgt spid="3">
+                                            <p:txEl>
+                                              <p:pRg st="9" end="9"/>
+                                            </p:txEl>
+                                          </p:spTgt>
+                                        </p:tgtEl>
+                                        <p:attrNameLst>
+                                          <p:attrName>style.visibility</p:attrName>
+                                        </p:attrNameLst>
+                                      </p:cBhvr>
+                                      <p:to>
+                                        <p:strVal val="visible"/>
+                                      </p:to>
+                                    </p:set>
+                                  </p:childTnLst>
+                                </p:cTn>
+                              </p:par>
+                            </p:childTnLst>
+                          </p:cTn>
+                        </p:par>
+                      </p:childTnLst>
+                    </p:cTn>
+                  </p:par>
                 </p:childTnLst>
               </p:cTn>
               <p:prevCondLst>
@@ -5354,6 +5911,123 @@
       </p:grpSpPr>
       <p:sp>
         <p:nvSpPr>
+          <p:cNvPr id="2" name="Title 1">
+            <a:extLst>
+              <a:ext uri="{FF2B5EF4-FFF2-40B4-BE49-F238E27FC236}">
+                <a16:creationId xmlns:a16="http://schemas.microsoft.com/office/drawing/2014/main" id="{9799A130-6A64-DE4F-BF94-A2349010343A}"/>
+              </a:ext>
+            </a:extLst>
+          </p:cNvPr>
+          <p:cNvSpPr>
+            <a:spLocks noGrp="1"/>
+          </p:cNvSpPr>
+          <p:nvPr>
+            <p:ph type="title"/>
+          </p:nvPr>
+        </p:nvSpPr>
+        <p:spPr/>
+        <p:txBody>
+          <a:bodyPr/>
+          <a:lstStyle/>
+          <a:p>
+            <a:r>
+              <a:rPr lang="en-US" dirty="0"/>
+              <a:t>Check the man page or documentation</a:t>
+            </a:r>
+          </a:p>
+        </p:txBody>
+      </p:sp>
+      <p:sp>
+        <p:nvSpPr>
+          <p:cNvPr id="4" name="Slide Number Placeholder 3">
+            <a:extLst>
+              <a:ext uri="{FF2B5EF4-FFF2-40B4-BE49-F238E27FC236}">
+                <a16:creationId xmlns:a16="http://schemas.microsoft.com/office/drawing/2014/main" id="{1E8790B1-F144-9D4E-AAED-B0106BF7B7B6}"/>
+              </a:ext>
+            </a:extLst>
+          </p:cNvPr>
+          <p:cNvSpPr>
+            <a:spLocks noGrp="1"/>
+          </p:cNvSpPr>
+          <p:nvPr>
+            <p:ph type="sldNum" sz="quarter" idx="12"/>
+          </p:nvPr>
+        </p:nvSpPr>
+        <p:spPr/>
+        <p:txBody>
+          <a:bodyPr/>
+          <a:lstStyle/>
+          <a:p>
+            <a:fld id="{7660B8C7-8D71-9344-9D3D-63100CE17378}" type="slidenum">
+              <a:rPr lang="en-US" smtClean="0"/>
+              <a:t>5</a:t>
+            </a:fld>
+            <a:endParaRPr lang="en-US"/>
+          </a:p>
+        </p:txBody>
+      </p:sp>
+      <p:pic>
+        <p:nvPicPr>
+          <p:cNvPr id="5" name="Picture 4">
+            <a:extLst>
+              <a:ext uri="{FF2B5EF4-FFF2-40B4-BE49-F238E27FC236}">
+                <a16:creationId xmlns:a16="http://schemas.microsoft.com/office/drawing/2014/main" id="{F0A98880-09B0-B645-B96F-8807E0129D91}"/>
+              </a:ext>
+            </a:extLst>
+          </p:cNvPr>
+          <p:cNvPicPr>
+            <a:picLocks noChangeAspect="1"/>
+          </p:cNvPicPr>
+          <p:nvPr/>
+        </p:nvPicPr>
+        <p:blipFill>
+          <a:blip r:embed="rId2"/>
+          <a:stretch>
+            <a:fillRect/>
+          </a:stretch>
+        </p:blipFill>
+        <p:spPr>
+          <a:xfrm>
+            <a:off x="916355" y="767344"/>
+            <a:ext cx="10625022" cy="5422901"/>
+          </a:xfrm>
+          <a:prstGeom prst="rect">
+            <a:avLst/>
+          </a:prstGeom>
+        </p:spPr>
+      </p:pic>
+    </p:spTree>
+    <p:extLst>
+      <p:ext uri="{BB962C8B-B14F-4D97-AF65-F5344CB8AC3E}">
+        <p14:creationId xmlns:p14="http://schemas.microsoft.com/office/powerpoint/2010/main" val="2857494772"/>
+      </p:ext>
+    </p:extLst>
+  </p:cSld>
+  <p:clrMapOvr>
+    <a:masterClrMapping/>
+  </p:clrMapOvr>
+</p:sld>
+</file>
+
+<file path=ppt/slides/slide6.xml><?xml version="1.0" encoding="utf-8"?>
+<p:sld xmlns:a="http://schemas.openxmlformats.org/drawingml/2006/main" xmlns:r="http://schemas.openxmlformats.org/officeDocument/2006/relationships" xmlns:p="http://schemas.openxmlformats.org/presentationml/2006/main">
+  <p:cSld>
+    <p:spTree>
+      <p:nvGrpSpPr>
+        <p:cNvPr id="1" name=""/>
+        <p:cNvGrpSpPr/>
+        <p:nvPr/>
+      </p:nvGrpSpPr>
+      <p:grpSpPr>
+        <a:xfrm>
+          <a:off x="0" y="0"/>
+          <a:ext cx="0" cy="0"/>
+          <a:chOff x="0" y="0"/>
+          <a:chExt cx="0" cy="0"/>
+        </a:xfrm>
+      </p:grpSpPr>
+      <p:sp>
+        <p:nvSpPr>
           <p:cNvPr id="4" name="Slide Number Placeholder 3">
             <a:extLst>
               <a:ext uri="{FF2B5EF4-FFF2-40B4-BE49-F238E27FC236}">
@@ -5375,7 +6049,7 @@
           <a:p>
             <a:fld id="{7660B8C7-8D71-9344-9D3D-63100CE17378}" type="slidenum">
               <a:rPr lang="en-US" smtClean="0"/>
-              <a:t>5</a:t>
+              <a:t>6</a:t>
             </a:fld>
             <a:endParaRPr lang="en-US"/>
           </a:p>
@@ -5493,123 +6167,6 @@
     <p:extLst>
       <p:ext uri="{BB962C8B-B14F-4D97-AF65-F5344CB8AC3E}">
         <p14:creationId xmlns:p14="http://schemas.microsoft.com/office/powerpoint/2010/main" val="243237489"/>
-      </p:ext>
-    </p:extLst>
-  </p:cSld>
-  <p:clrMapOvr>
-    <a:masterClrMapping/>
-  </p:clrMapOvr>
-</p:sld>
-</file>
-
-<file path=ppt/slides/slide6.xml><?xml version="1.0" encoding="utf-8"?>
-<p:sld xmlns:a="http://schemas.openxmlformats.org/drawingml/2006/main" xmlns:r="http://schemas.openxmlformats.org/officeDocument/2006/relationships" xmlns:p="http://schemas.openxmlformats.org/presentationml/2006/main">
-  <p:cSld>
-    <p:spTree>
-      <p:nvGrpSpPr>
-        <p:cNvPr id="1" name=""/>
-        <p:cNvGrpSpPr/>
-        <p:nvPr/>
-      </p:nvGrpSpPr>
-      <p:grpSpPr>
-        <a:xfrm>
-          <a:off x="0" y="0"/>
-          <a:ext cx="0" cy="0"/>
-          <a:chOff x="0" y="0"/>
-          <a:chExt cx="0" cy="0"/>
-        </a:xfrm>
-      </p:grpSpPr>
-      <p:sp>
-        <p:nvSpPr>
-          <p:cNvPr id="2" name="Title 1">
-            <a:extLst>
-              <a:ext uri="{FF2B5EF4-FFF2-40B4-BE49-F238E27FC236}">
-                <a16:creationId xmlns:a16="http://schemas.microsoft.com/office/drawing/2014/main" id="{9799A130-6A64-DE4F-BF94-A2349010343A}"/>
-              </a:ext>
-            </a:extLst>
-          </p:cNvPr>
-          <p:cNvSpPr>
-            <a:spLocks noGrp="1"/>
-          </p:cNvSpPr>
-          <p:nvPr>
-            <p:ph type="title"/>
-          </p:nvPr>
-        </p:nvSpPr>
-        <p:spPr/>
-        <p:txBody>
-          <a:bodyPr/>
-          <a:lstStyle/>
-          <a:p>
-            <a:r>
-              <a:rPr lang="en-US" dirty="0"/>
-              <a:t>Check the man page or documentation</a:t>
-            </a:r>
-          </a:p>
-        </p:txBody>
-      </p:sp>
-      <p:sp>
-        <p:nvSpPr>
-          <p:cNvPr id="4" name="Slide Number Placeholder 3">
-            <a:extLst>
-              <a:ext uri="{FF2B5EF4-FFF2-40B4-BE49-F238E27FC236}">
-                <a16:creationId xmlns:a16="http://schemas.microsoft.com/office/drawing/2014/main" id="{1E8790B1-F144-9D4E-AAED-B0106BF7B7B6}"/>
-              </a:ext>
-            </a:extLst>
-          </p:cNvPr>
-          <p:cNvSpPr>
-            <a:spLocks noGrp="1"/>
-          </p:cNvSpPr>
-          <p:nvPr>
-            <p:ph type="sldNum" sz="quarter" idx="12"/>
-          </p:nvPr>
-        </p:nvSpPr>
-        <p:spPr/>
-        <p:txBody>
-          <a:bodyPr/>
-          <a:lstStyle/>
-          <a:p>
-            <a:fld id="{7660B8C7-8D71-9344-9D3D-63100CE17378}" type="slidenum">
-              <a:rPr lang="en-US" smtClean="0"/>
-              <a:t>6</a:t>
-            </a:fld>
-            <a:endParaRPr lang="en-US"/>
-          </a:p>
-        </p:txBody>
-      </p:sp>
-      <p:pic>
-        <p:nvPicPr>
-          <p:cNvPr id="5" name="Picture 4">
-            <a:extLst>
-              <a:ext uri="{FF2B5EF4-FFF2-40B4-BE49-F238E27FC236}">
-                <a16:creationId xmlns:a16="http://schemas.microsoft.com/office/drawing/2014/main" id="{F0A98880-09B0-B645-B96F-8807E0129D91}"/>
-              </a:ext>
-            </a:extLst>
-          </p:cNvPr>
-          <p:cNvPicPr>
-            <a:picLocks noChangeAspect="1"/>
-          </p:cNvPicPr>
-          <p:nvPr/>
-        </p:nvPicPr>
-        <p:blipFill>
-          <a:blip r:embed="rId2"/>
-          <a:stretch>
-            <a:fillRect/>
-          </a:stretch>
-        </p:blipFill>
-        <p:spPr>
-          <a:xfrm>
-            <a:off x="916355" y="767344"/>
-            <a:ext cx="10625022" cy="5422901"/>
-          </a:xfrm>
-          <a:prstGeom prst="rect">
-            <a:avLst/>
-          </a:prstGeom>
-        </p:spPr>
-      </p:pic>
-    </p:spTree>
-    <p:extLst>
-      <p:ext uri="{BB962C8B-B14F-4D97-AF65-F5344CB8AC3E}">
-        <p14:creationId xmlns:p14="http://schemas.microsoft.com/office/powerpoint/2010/main" val="2857494772"/>
       </p:ext>
     </p:extLst>
   </p:cSld>
@@ -5758,6 +6315,209 @@
           <p:cNvPr id="2" name="Title 1">
             <a:extLst>
               <a:ext uri="{FF2B5EF4-FFF2-40B4-BE49-F238E27FC236}">
+                <a16:creationId xmlns:a16="http://schemas.microsoft.com/office/drawing/2014/main" id="{0D43B8BA-70AF-B2BE-E146-12A193FEF834}"/>
+              </a:ext>
+            </a:extLst>
+          </p:cNvPr>
+          <p:cNvSpPr>
+            <a:spLocks noGrp="1"/>
+          </p:cNvSpPr>
+          <p:nvPr>
+            <p:ph type="title"/>
+          </p:nvPr>
+        </p:nvSpPr>
+        <p:spPr/>
+        <p:txBody>
+          <a:bodyPr/>
+          <a:lstStyle/>
+          <a:p>
+            <a:r>
+              <a:rPr lang="en-US" dirty="0"/>
+              <a:t>Using AI to write code</a:t>
+            </a:r>
+          </a:p>
+        </p:txBody>
+      </p:sp>
+      <p:sp>
+        <p:nvSpPr>
+          <p:cNvPr id="4" name="Slide Number Placeholder 3">
+            <a:extLst>
+              <a:ext uri="{FF2B5EF4-FFF2-40B4-BE49-F238E27FC236}">
+                <a16:creationId xmlns:a16="http://schemas.microsoft.com/office/drawing/2014/main" id="{2B0FD78F-5595-FB11-1474-F2F254B4CBF5}"/>
+              </a:ext>
+            </a:extLst>
+          </p:cNvPr>
+          <p:cNvSpPr>
+            <a:spLocks noGrp="1"/>
+          </p:cNvSpPr>
+          <p:nvPr>
+            <p:ph type="sldNum" sz="quarter" idx="12"/>
+          </p:nvPr>
+        </p:nvSpPr>
+        <p:spPr/>
+        <p:txBody>
+          <a:bodyPr/>
+          <a:lstStyle/>
+          <a:p>
+            <a:fld id="{7660B8C7-8D71-9344-9D3D-63100CE17378}" type="slidenum">
+              <a:rPr lang="en-US" smtClean="0"/>
+              <a:t>8</a:t>
+            </a:fld>
+            <a:endParaRPr lang="en-US"/>
+          </a:p>
+        </p:txBody>
+      </p:sp>
+      <p:pic>
+        <p:nvPicPr>
+          <p:cNvPr id="1026" name="Picture 2" descr="ChatGPT: A Problem for Developers : r/ChatGPT">
+            <a:extLst>
+              <a:ext uri="{FF2B5EF4-FFF2-40B4-BE49-F238E27FC236}">
+                <a16:creationId xmlns:a16="http://schemas.microsoft.com/office/drawing/2014/main" id="{C1D57483-B04B-6D55-0981-ED78EE70227E}"/>
+              </a:ext>
+            </a:extLst>
+          </p:cNvPr>
+          <p:cNvPicPr>
+            <a:picLocks noGrp="1" noChangeAspect="1" noChangeArrowheads="1"/>
+          </p:cNvPicPr>
+          <p:nvPr>
+            <p:ph idx="1"/>
+          </p:nvPr>
+        </p:nvPicPr>
+        <p:blipFill>
+          <a:blip r:embed="rId2">
+            <a:extLst>
+              <a:ext uri="{28A0092B-C50C-407E-A947-70E740481C1C}">
+                <a14:useLocalDpi xmlns:a14="http://schemas.microsoft.com/office/drawing/2010/main" val="0"/>
+              </a:ext>
+            </a:extLst>
+          </a:blip>
+          <a:srcRect/>
+          <a:stretch>
+            <a:fillRect/>
+          </a:stretch>
+        </p:blipFill>
+        <p:spPr bwMode="auto">
+          <a:xfrm>
+            <a:off x="2722467" y="1293441"/>
+            <a:ext cx="6747065" cy="4280170"/>
+          </a:xfrm>
+          <a:prstGeom prst="rect">
+            <a:avLst/>
+          </a:prstGeom>
+          <a:noFill/>
+          <a:extLst>
+            <a:ext uri="{909E8E84-426E-40DD-AFC4-6F175D3DCCD1}">
+              <a14:hiddenFill xmlns:a14="http://schemas.microsoft.com/office/drawing/2010/main">
+                <a:solidFill>
+                  <a:srgbClr val="FFFFFF"/>
+                </a:solidFill>
+              </a14:hiddenFill>
+            </a:ext>
+          </a:extLst>
+        </p:spPr>
+      </p:pic>
+      <p:sp>
+        <p:nvSpPr>
+          <p:cNvPr id="6" name="Rounded Rectangle 5">
+            <a:extLst>
+              <a:ext uri="{FF2B5EF4-FFF2-40B4-BE49-F238E27FC236}">
+                <a16:creationId xmlns:a16="http://schemas.microsoft.com/office/drawing/2014/main" id="{2772253D-4079-C2B8-FBBC-FCA6069E7688}"/>
+              </a:ext>
+            </a:extLst>
+          </p:cNvPr>
+          <p:cNvSpPr/>
+          <p:nvPr/>
+        </p:nvSpPr>
+        <p:spPr>
+          <a:xfrm>
+            <a:off x="9621078" y="601239"/>
+            <a:ext cx="2345635" cy="2579283"/>
+          </a:xfrm>
+          <a:prstGeom prst="roundRect">
+            <a:avLst>
+              <a:gd name="adj" fmla="val 17232"/>
+            </a:avLst>
+          </a:prstGeom>
+          <a:solidFill>
+            <a:srgbClr val="007EC6"/>
+          </a:solidFill>
+        </p:spPr>
+        <p:style>
+          <a:lnRef idx="1">
+            <a:schemeClr val="accent1"/>
+          </a:lnRef>
+          <a:fillRef idx="3">
+            <a:schemeClr val="accent1"/>
+          </a:fillRef>
+          <a:effectRef idx="2">
+            <a:schemeClr val="accent1"/>
+          </a:effectRef>
+          <a:fontRef idx="minor">
+            <a:schemeClr val="lt1"/>
+          </a:fontRef>
+        </p:style>
+        <p:txBody>
+          <a:bodyPr rtlCol="0" anchor="ctr"/>
+          <a:lstStyle/>
+          <a:p>
+            <a:pPr algn="ctr"/>
+            <a:r>
+              <a:rPr lang="en-US" dirty="0"/>
+              <a:t>We have our own HudsonAlpha ChatGPT with stronger privacy guarantees</a:t>
+            </a:r>
+          </a:p>
+          <a:p>
+            <a:pPr algn="ctr"/>
+            <a:endParaRPr lang="en-US" dirty="0"/>
+          </a:p>
+          <a:p>
+            <a:pPr algn="ctr"/>
+            <a:r>
+              <a:rPr lang="en-US" dirty="0" err="1"/>
+              <a:t>ai.apps.haib.org</a:t>
+            </a:r>
+            <a:r>
+              <a:rPr lang="en-US" dirty="0"/>
+              <a:t>/</a:t>
+            </a:r>
+          </a:p>
+        </p:txBody>
+      </p:sp>
+    </p:spTree>
+    <p:extLst>
+      <p:ext uri="{BB962C8B-B14F-4D97-AF65-F5344CB8AC3E}">
+        <p14:creationId xmlns:p14="http://schemas.microsoft.com/office/powerpoint/2010/main" val="1001357576"/>
+      </p:ext>
+    </p:extLst>
+  </p:cSld>
+  <p:clrMapOvr>
+    <a:masterClrMapping/>
+  </p:clrMapOvr>
+</p:sld>
+</file>
+
+<file path=ppt/slides/slide9.xml><?xml version="1.0" encoding="utf-8"?>
+<p:sld xmlns:a="http://schemas.openxmlformats.org/drawingml/2006/main" xmlns:r="http://schemas.openxmlformats.org/officeDocument/2006/relationships" xmlns:p="http://schemas.openxmlformats.org/presentationml/2006/main">
+  <p:cSld>
+    <p:spTree>
+      <p:nvGrpSpPr>
+        <p:cNvPr id="1" name=""/>
+        <p:cNvGrpSpPr/>
+        <p:nvPr/>
+      </p:nvGrpSpPr>
+      <p:grpSpPr>
+        <a:xfrm>
+          <a:off x="0" y="0"/>
+          <a:ext cx="0" cy="0"/>
+          <a:chOff x="0" y="0"/>
+          <a:chExt cx="0" cy="0"/>
+        </a:xfrm>
+      </p:grpSpPr>
+      <p:sp>
+        <p:nvSpPr>
+          <p:cNvPr id="2" name="Title 1">
+            <a:extLst>
+              <a:ext uri="{FF2B5EF4-FFF2-40B4-BE49-F238E27FC236}">
                 <a16:creationId xmlns:a16="http://schemas.microsoft.com/office/drawing/2014/main" id="{AB53F57A-8C13-F247-8BE6-222B3859D600}"/>
               </a:ext>
             </a:extLst>
@@ -5804,7 +6564,7 @@
           <a:p>
             <a:fld id="{7660B8C7-8D71-9344-9D3D-63100CE17378}" type="slidenum">
               <a:rPr lang="en-US" smtClean="0"/>
-              <a:t>8</a:t>
+              <a:t>9</a:t>
             </a:fld>
             <a:endParaRPr lang="en-US"/>
           </a:p>
@@ -5850,639 +6610,6 @@
   <p:clrMapOvr>
     <a:masterClrMapping/>
   </p:clrMapOvr>
-</p:sld>
-</file>
-
-<file path=ppt/slides/slide9.xml><?xml version="1.0" encoding="utf-8"?>
-<p:sld xmlns:a="http://schemas.openxmlformats.org/drawingml/2006/main" xmlns:r="http://schemas.openxmlformats.org/officeDocument/2006/relationships" xmlns:p="http://schemas.openxmlformats.org/presentationml/2006/main">
-  <p:cSld>
-    <p:spTree>
-      <p:nvGrpSpPr>
-        <p:cNvPr id="1" name=""/>
-        <p:cNvGrpSpPr/>
-        <p:nvPr/>
-      </p:nvGrpSpPr>
-      <p:grpSpPr>
-        <a:xfrm>
-          <a:off x="0" y="0"/>
-          <a:ext cx="0" cy="0"/>
-          <a:chOff x="0" y="0"/>
-          <a:chExt cx="0" cy="0"/>
-        </a:xfrm>
-      </p:grpSpPr>
-      <p:sp>
-        <p:nvSpPr>
-          <p:cNvPr id="2" name="Title 1">
-            <a:extLst>
-              <a:ext uri="{FF2B5EF4-FFF2-40B4-BE49-F238E27FC236}">
-                <a16:creationId xmlns:a16="http://schemas.microsoft.com/office/drawing/2014/main" id="{ADBFFA3F-FB02-0349-A0BA-51E0F4C81862}"/>
-              </a:ext>
-            </a:extLst>
-          </p:cNvPr>
-          <p:cNvSpPr>
-            <a:spLocks noGrp="1"/>
-          </p:cNvSpPr>
-          <p:nvPr>
-            <p:ph type="title"/>
-          </p:nvPr>
-        </p:nvSpPr>
-        <p:spPr/>
-        <p:txBody>
-          <a:bodyPr/>
-          <a:lstStyle/>
-          <a:p>
-            <a:r>
-              <a:rPr lang="en-US" dirty="0"/>
-              <a:t>An asking-for-help script</a:t>
-            </a:r>
-          </a:p>
-        </p:txBody>
-      </p:sp>
-      <p:sp>
-        <p:nvSpPr>
-          <p:cNvPr id="3" name="Content Placeholder 2">
-            <a:extLst>
-              <a:ext uri="{FF2B5EF4-FFF2-40B4-BE49-F238E27FC236}">
-                <a16:creationId xmlns:a16="http://schemas.microsoft.com/office/drawing/2014/main" id="{F6F4CDAA-2445-2F4B-BBE0-DF06116F4985}"/>
-              </a:ext>
-            </a:extLst>
-          </p:cNvPr>
-          <p:cNvSpPr>
-            <a:spLocks noGrp="1"/>
-          </p:cNvSpPr>
-          <p:nvPr>
-            <p:ph idx="1"/>
-          </p:nvPr>
-        </p:nvSpPr>
-        <p:spPr>
-          <a:xfrm>
-            <a:off x="609600" y="1039858"/>
-            <a:ext cx="10972800" cy="5086305"/>
-          </a:xfrm>
-        </p:spPr>
-        <p:txBody>
-          <a:bodyPr/>
-          <a:lstStyle/>
-          <a:p>
-            <a:pPr marL="0" indent="0">
-              <a:buNone/>
-            </a:pPr>
-            <a:r>
-              <a:rPr lang="en-US" dirty="0"/>
-              <a:t>My overall goal is to: </a:t>
-            </a:r>
-            <a:r>
-              <a:rPr lang="en-US" u="sng" dirty="0"/>
-              <a:t>clean up clutter in my home directory</a:t>
-            </a:r>
-            <a:r>
-              <a:rPr lang="en-US" dirty="0"/>
-              <a:t>.</a:t>
-            </a:r>
-          </a:p>
-          <a:p>
-            <a:pPr marL="0" indent="0">
-              <a:buNone/>
-            </a:pPr>
-            <a:r>
-              <a:rPr lang="en-US" dirty="0"/>
-              <a:t>I’m trying to: </a:t>
-            </a:r>
-            <a:r>
-              <a:rPr lang="en-US" u="sng" dirty="0"/>
-              <a:t>remove the directory </a:t>
-            </a:r>
-            <a:r>
-              <a:rPr lang="en-US" u="sng" dirty="0" err="1"/>
-              <a:t>TemporaryFiles</a:t>
-            </a:r>
-            <a:r>
-              <a:rPr lang="en-US" u="sng" dirty="0"/>
-              <a:t>.</a:t>
-            </a:r>
-          </a:p>
-          <a:p>
-            <a:pPr marL="0" indent="0">
-              <a:buNone/>
-            </a:pPr>
-            <a:r>
-              <a:rPr lang="en-US" dirty="0"/>
-              <a:t>I tried: </a:t>
-            </a:r>
-            <a:r>
-              <a:rPr lang="en-US" u="sng" dirty="0" err="1">
-                <a:latin typeface="Courier New" panose="02070309020205020404" pitchFamily="49" charset="0"/>
-                <a:cs typeface="Courier New" panose="02070309020205020404" pitchFamily="49" charset="0"/>
-              </a:rPr>
-              <a:t>rm</a:t>
-            </a:r>
-            <a:r>
-              <a:rPr lang="en-US" u="sng" dirty="0">
-                <a:latin typeface="Courier New" panose="02070309020205020404" pitchFamily="49" charset="0"/>
-                <a:cs typeface="Courier New" panose="02070309020205020404" pitchFamily="49" charset="0"/>
-              </a:rPr>
-              <a:t> </a:t>
-            </a:r>
-            <a:r>
-              <a:rPr lang="en-US" u="sng" dirty="0" err="1">
-                <a:latin typeface="Courier New" panose="02070309020205020404" pitchFamily="49" charset="0"/>
-                <a:cs typeface="Courier New" panose="02070309020205020404" pitchFamily="49" charset="0"/>
-              </a:rPr>
-              <a:t>TemporaryFiles</a:t>
-            </a:r>
-            <a:endParaRPr lang="en-US" u="sng" dirty="0">
-              <a:latin typeface="Courier New" panose="02070309020205020404" pitchFamily="49" charset="0"/>
-              <a:cs typeface="Courier New" panose="02070309020205020404" pitchFamily="49" charset="0"/>
-            </a:endParaRPr>
-          </a:p>
-          <a:p>
-            <a:pPr marL="0" indent="0">
-              <a:buNone/>
-            </a:pPr>
-            <a:r>
-              <a:rPr lang="en-US" dirty="0">
-                <a:cs typeface="Courier New" panose="02070309020205020404" pitchFamily="49" charset="0"/>
-              </a:rPr>
-              <a:t>I expected: </a:t>
-            </a:r>
-            <a:r>
-              <a:rPr lang="en-US" u="sng" dirty="0" err="1">
-                <a:cs typeface="Courier New" panose="02070309020205020404" pitchFamily="49" charset="0"/>
-              </a:rPr>
-              <a:t>TemporaryFiles</a:t>
-            </a:r>
-            <a:r>
-              <a:rPr lang="en-US" u="sng" dirty="0">
-                <a:cs typeface="Courier New" panose="02070309020205020404" pitchFamily="49" charset="0"/>
-              </a:rPr>
-              <a:t> would immediately go away</a:t>
-            </a:r>
-          </a:p>
-          <a:p>
-            <a:pPr marL="0" indent="0">
-              <a:buNone/>
-            </a:pPr>
-            <a:r>
-              <a:rPr lang="en-US" dirty="0">
-                <a:cs typeface="Courier New" panose="02070309020205020404" pitchFamily="49" charset="0"/>
-              </a:rPr>
-              <a:t>But instead:</a:t>
-            </a:r>
-          </a:p>
-          <a:p>
-            <a:r>
-              <a:rPr lang="en-US" dirty="0">
-                <a:cs typeface="Courier New" panose="02070309020205020404" pitchFamily="49" charset="0"/>
-              </a:rPr>
-              <a:t>I got an error message: </a:t>
-            </a:r>
-            <a:r>
-              <a:rPr lang="en-US" u="sng" dirty="0" err="1">
-                <a:cs typeface="Courier New" panose="02070309020205020404" pitchFamily="49" charset="0"/>
-              </a:rPr>
-              <a:t>rm</a:t>
-            </a:r>
-            <a:r>
-              <a:rPr lang="en-US" u="sng" dirty="0">
-                <a:cs typeface="Courier New" panose="02070309020205020404" pitchFamily="49" charset="0"/>
-              </a:rPr>
-              <a:t>: </a:t>
-            </a:r>
-            <a:r>
-              <a:rPr lang="en-US" u="sng" dirty="0" err="1">
-                <a:cs typeface="Courier New" panose="02070309020205020404" pitchFamily="49" charset="0"/>
-              </a:rPr>
-              <a:t>TemporaryFiles</a:t>
-            </a:r>
-            <a:r>
-              <a:rPr lang="en-US" u="sng" dirty="0">
-                <a:cs typeface="Courier New" panose="02070309020205020404" pitchFamily="49" charset="0"/>
-              </a:rPr>
-              <a:t> is a directory</a:t>
-            </a:r>
-          </a:p>
-          <a:p>
-            <a:r>
-              <a:rPr lang="en-US" dirty="0">
-                <a:cs typeface="Courier New" panose="02070309020205020404" pitchFamily="49" charset="0"/>
-              </a:rPr>
-              <a:t>Something unexpected happened: ____________</a:t>
-            </a:r>
-          </a:p>
-        </p:txBody>
-      </p:sp>
-      <p:sp>
-        <p:nvSpPr>
-          <p:cNvPr id="4" name="Slide Number Placeholder 3">
-            <a:extLst>
-              <a:ext uri="{FF2B5EF4-FFF2-40B4-BE49-F238E27FC236}">
-                <a16:creationId xmlns:a16="http://schemas.microsoft.com/office/drawing/2014/main" id="{0347FC39-F3EA-8C45-AB19-B6360EFA590E}"/>
-              </a:ext>
-            </a:extLst>
-          </p:cNvPr>
-          <p:cNvSpPr>
-            <a:spLocks noGrp="1"/>
-          </p:cNvSpPr>
-          <p:nvPr>
-            <p:ph type="sldNum" sz="quarter" idx="12"/>
-          </p:nvPr>
-        </p:nvSpPr>
-        <p:spPr/>
-        <p:txBody>
-          <a:bodyPr/>
-          <a:lstStyle/>
-          <a:p>
-            <a:fld id="{7660B8C7-8D71-9344-9D3D-63100CE17378}" type="slidenum">
-              <a:rPr lang="en-US" smtClean="0"/>
-              <a:t>9</a:t>
-            </a:fld>
-            <a:endParaRPr lang="en-US"/>
-          </a:p>
-        </p:txBody>
-      </p:sp>
-    </p:spTree>
-    <p:extLst>
-      <p:ext uri="{BB962C8B-B14F-4D97-AF65-F5344CB8AC3E}">
-        <p14:creationId xmlns:p14="http://schemas.microsoft.com/office/powerpoint/2010/main" val="2166275785"/>
-      </p:ext>
-    </p:extLst>
-  </p:cSld>
-  <p:clrMapOvr>
-    <a:masterClrMapping/>
-  </p:clrMapOvr>
-  <p:timing>
-    <p:tnLst>
-      <p:par>
-        <p:cTn id="1" dur="indefinite" restart="never" nodeType="tmRoot">
-          <p:childTnLst>
-            <p:seq concurrent="1" nextAc="seek">
-              <p:cTn id="2" dur="indefinite" nodeType="mainSeq">
-                <p:childTnLst>
-                  <p:par>
-                    <p:cTn id="3" fill="hold">
-                      <p:stCondLst>
-                        <p:cond delay="indefinite"/>
-                      </p:stCondLst>
-                      <p:childTnLst>
-                        <p:par>
-                          <p:cTn id="4" fill="hold">
-                            <p:stCondLst>
-                              <p:cond delay="0"/>
-                            </p:stCondLst>
-                            <p:childTnLst>
-                              <p:par>
-                                <p:cTn id="5" presetID="1" presetClass="entr" presetSubtype="0" fill="hold" nodeType="clickEffect">
-                                  <p:stCondLst>
-                                    <p:cond delay="0"/>
-                                  </p:stCondLst>
-                                  <p:childTnLst>
-                                    <p:set>
-                                      <p:cBhvr>
-                                        <p:cTn id="6" dur="1" fill="hold">
-                                          <p:stCondLst>
-                                            <p:cond delay="0"/>
-                                          </p:stCondLst>
-                                        </p:cTn>
-                                        <p:tgtEl>
-                                          <p:spTgt spid="3">
-                                            <p:txEl>
-                                              <p:pRg st="0" end="0"/>
-                                            </p:txEl>
-                                          </p:spTgt>
-                                        </p:tgtEl>
-                                        <p:attrNameLst>
-                                          <p:attrName>style.visibility</p:attrName>
-                                        </p:attrNameLst>
-                                      </p:cBhvr>
-                                      <p:to>
-                                        <p:strVal val="visible"/>
-                                      </p:to>
-                                    </p:set>
-                                  </p:childTnLst>
-                                </p:cTn>
-                              </p:par>
-                            </p:childTnLst>
-                          </p:cTn>
-                        </p:par>
-                      </p:childTnLst>
-                    </p:cTn>
-                  </p:par>
-                  <p:par>
-                    <p:cTn id="7" fill="hold">
-                      <p:stCondLst>
-                        <p:cond delay="indefinite"/>
-                      </p:stCondLst>
-                      <p:childTnLst>
-                        <p:par>
-                          <p:cTn id="8" fill="hold">
-                            <p:stCondLst>
-                              <p:cond delay="0"/>
-                            </p:stCondLst>
-                            <p:childTnLst>
-                              <p:par>
-                                <p:cTn id="9" presetID="1" presetClass="entr" presetSubtype="0" fill="hold" nodeType="clickEffect">
-                                  <p:stCondLst>
-                                    <p:cond delay="0"/>
-                                  </p:stCondLst>
-                                  <p:childTnLst>
-                                    <p:set>
-                                      <p:cBhvr>
-                                        <p:cTn id="10" dur="1" fill="hold">
-                                          <p:stCondLst>
-                                            <p:cond delay="0"/>
-                                          </p:stCondLst>
-                                        </p:cTn>
-                                        <p:tgtEl>
-                                          <p:spTgt spid="3">
-                                            <p:txEl>
-                                              <p:pRg st="1" end="1"/>
-                                            </p:txEl>
-                                          </p:spTgt>
-                                        </p:tgtEl>
-                                        <p:attrNameLst>
-                                          <p:attrName>style.visibility</p:attrName>
-                                        </p:attrNameLst>
-                                      </p:cBhvr>
-                                      <p:to>
-                                        <p:strVal val="visible"/>
-                                      </p:to>
-                                    </p:set>
-                                  </p:childTnLst>
-                                </p:cTn>
-                              </p:par>
-                            </p:childTnLst>
-                          </p:cTn>
-                        </p:par>
-                      </p:childTnLst>
-                    </p:cTn>
-                  </p:par>
-                  <p:par>
-                    <p:cTn id="11" fill="hold">
-                      <p:stCondLst>
-                        <p:cond delay="indefinite"/>
-                      </p:stCondLst>
-                      <p:childTnLst>
-                        <p:par>
-                          <p:cTn id="12" fill="hold">
-                            <p:stCondLst>
-                              <p:cond delay="0"/>
-                            </p:stCondLst>
-                            <p:childTnLst>
-                              <p:par>
-                                <p:cTn id="13" presetID="1" presetClass="entr" presetSubtype="0" fill="hold" nodeType="clickEffect">
-                                  <p:stCondLst>
-                                    <p:cond delay="0"/>
-                                  </p:stCondLst>
-                                  <p:childTnLst>
-                                    <p:set>
-                                      <p:cBhvr>
-                                        <p:cTn id="14" dur="1" fill="hold">
-                                          <p:stCondLst>
-                                            <p:cond delay="0"/>
-                                          </p:stCondLst>
-                                        </p:cTn>
-                                        <p:tgtEl>
-                                          <p:spTgt spid="3">
-                                            <p:txEl>
-                                              <p:pRg st="2" end="2"/>
-                                            </p:txEl>
-                                          </p:spTgt>
-                                        </p:tgtEl>
-                                        <p:attrNameLst>
-                                          <p:attrName>style.visibility</p:attrName>
-                                        </p:attrNameLst>
-                                      </p:cBhvr>
-                                      <p:to>
-                                        <p:strVal val="visible"/>
-                                      </p:to>
-                                    </p:set>
-                                  </p:childTnLst>
-                                </p:cTn>
-                              </p:par>
-                            </p:childTnLst>
-                          </p:cTn>
-                        </p:par>
-                      </p:childTnLst>
-                    </p:cTn>
-                  </p:par>
-                  <p:par>
-                    <p:cTn id="15" fill="hold">
-                      <p:stCondLst>
-                        <p:cond delay="indefinite"/>
-                      </p:stCondLst>
-                      <p:childTnLst>
-                        <p:par>
-                          <p:cTn id="16" fill="hold">
-                            <p:stCondLst>
-                              <p:cond delay="0"/>
-                            </p:stCondLst>
-                            <p:childTnLst>
-                              <p:par>
-                                <p:cTn id="17" presetID="1" presetClass="entr" presetSubtype="0" fill="hold" nodeType="clickEffect">
-                                  <p:stCondLst>
-                                    <p:cond delay="0"/>
-                                  </p:stCondLst>
-                                  <p:childTnLst>
-                                    <p:set>
-                                      <p:cBhvr>
-                                        <p:cTn id="18" dur="1" fill="hold">
-                                          <p:stCondLst>
-                                            <p:cond delay="0"/>
-                                          </p:stCondLst>
-                                        </p:cTn>
-                                        <p:tgtEl>
-                                          <p:spTgt spid="3">
-                                            <p:txEl>
-                                              <p:pRg st="3" end="3"/>
-                                            </p:txEl>
-                                          </p:spTgt>
-                                        </p:tgtEl>
-                                        <p:attrNameLst>
-                                          <p:attrName>style.visibility</p:attrName>
-                                        </p:attrNameLst>
-                                      </p:cBhvr>
-                                      <p:to>
-                                        <p:strVal val="visible"/>
-                                      </p:to>
-                                    </p:set>
-                                  </p:childTnLst>
-                                </p:cTn>
-                              </p:par>
-                            </p:childTnLst>
-                          </p:cTn>
-                        </p:par>
-                      </p:childTnLst>
-                    </p:cTn>
-                  </p:par>
-                  <p:par>
-                    <p:cTn id="19" fill="hold">
-                      <p:stCondLst>
-                        <p:cond delay="indefinite"/>
-                      </p:stCondLst>
-                      <p:childTnLst>
-                        <p:par>
-                          <p:cTn id="20" fill="hold">
-                            <p:stCondLst>
-                              <p:cond delay="0"/>
-                            </p:stCondLst>
-                            <p:childTnLst>
-                              <p:par>
-                                <p:cTn id="21" presetID="1" presetClass="entr" presetSubtype="0" fill="hold" nodeType="clickEffect">
-                                  <p:stCondLst>
-                                    <p:cond delay="0"/>
-                                  </p:stCondLst>
-                                  <p:childTnLst>
-                                    <p:set>
-                                      <p:cBhvr>
-                                        <p:cTn id="22" dur="1" fill="hold">
-                                          <p:stCondLst>
-                                            <p:cond delay="0"/>
-                                          </p:stCondLst>
-                                        </p:cTn>
-                                        <p:tgtEl>
-                                          <p:spTgt spid="3">
-                                            <p:txEl>
-                                              <p:pRg st="4" end="4"/>
-                                            </p:txEl>
-                                          </p:spTgt>
-                                        </p:tgtEl>
-                                        <p:attrNameLst>
-                                          <p:attrName>style.visibility</p:attrName>
-                                        </p:attrNameLst>
-                                      </p:cBhvr>
-                                      <p:to>
-                                        <p:strVal val="visible"/>
-                                      </p:to>
-                                    </p:set>
-                                  </p:childTnLst>
-                                </p:cTn>
-                              </p:par>
-                            </p:childTnLst>
-                          </p:cTn>
-                        </p:par>
-                      </p:childTnLst>
-                    </p:cTn>
-                  </p:par>
-                  <p:par>
-                    <p:cTn id="23" fill="hold">
-                      <p:stCondLst>
-                        <p:cond delay="indefinite"/>
-                      </p:stCondLst>
-                      <p:childTnLst>
-                        <p:par>
-                          <p:cTn id="24" fill="hold">
-                            <p:stCondLst>
-                              <p:cond delay="0"/>
-                            </p:stCondLst>
-                            <p:childTnLst>
-                              <p:par>
-                                <p:cTn id="25" presetID="1" presetClass="entr" presetSubtype="0" fill="hold" nodeType="clickEffect">
-                                  <p:stCondLst>
-                                    <p:cond delay="0"/>
-                                  </p:stCondLst>
-                                  <p:childTnLst>
-                                    <p:set>
-                                      <p:cBhvr>
-                                        <p:cTn id="26" dur="1" fill="hold">
-                                          <p:stCondLst>
-                                            <p:cond delay="0"/>
-                                          </p:stCondLst>
-                                        </p:cTn>
-                                        <p:tgtEl>
-                                          <p:spTgt spid="3">
-                                            <p:txEl>
-                                              <p:pRg st="5" end="5"/>
-                                            </p:txEl>
-                                          </p:spTgt>
-                                        </p:tgtEl>
-                                        <p:attrNameLst>
-                                          <p:attrName>style.visibility</p:attrName>
-                                        </p:attrNameLst>
-                                      </p:cBhvr>
-                                      <p:to>
-                                        <p:strVal val="visible"/>
-                                      </p:to>
-                                    </p:set>
-                                  </p:childTnLst>
-                                </p:cTn>
-                              </p:par>
-                            </p:childTnLst>
-                          </p:cTn>
-                        </p:par>
-                      </p:childTnLst>
-                    </p:cTn>
-                  </p:par>
-                  <p:par>
-                    <p:cTn id="27" fill="hold">
-                      <p:stCondLst>
-                        <p:cond delay="indefinite"/>
-                      </p:stCondLst>
-                      <p:childTnLst>
-                        <p:par>
-                          <p:cTn id="28" fill="hold">
-                            <p:stCondLst>
-                              <p:cond delay="0"/>
-                            </p:stCondLst>
-                            <p:childTnLst>
-                              <p:par>
-                                <p:cTn id="29" presetID="1" presetClass="entr" presetSubtype="0" fill="hold" nodeType="clickEffect">
-                                  <p:stCondLst>
-                                    <p:cond delay="0"/>
-                                  </p:stCondLst>
-                                  <p:childTnLst>
-                                    <p:set>
-                                      <p:cBhvr>
-                                        <p:cTn id="30" dur="1" fill="hold">
-                                          <p:stCondLst>
-                                            <p:cond delay="0"/>
-                                          </p:stCondLst>
-                                        </p:cTn>
-                                        <p:tgtEl>
-                                          <p:spTgt spid="3">
-                                            <p:txEl>
-                                              <p:pRg st="6" end="6"/>
-                                            </p:txEl>
-                                          </p:spTgt>
-                                        </p:tgtEl>
-                                        <p:attrNameLst>
-                                          <p:attrName>style.visibility</p:attrName>
-                                        </p:attrNameLst>
-                                      </p:cBhvr>
-                                      <p:to>
-                                        <p:strVal val="visible"/>
-                                      </p:to>
-                                    </p:set>
-                                  </p:childTnLst>
-                                </p:cTn>
-                              </p:par>
-                            </p:childTnLst>
-                          </p:cTn>
-                        </p:par>
-                      </p:childTnLst>
-                    </p:cTn>
-                  </p:par>
-                </p:childTnLst>
-              </p:cTn>
-              <p:prevCondLst>
-                <p:cond evt="onPrev" delay="0">
-                  <p:tgtEl>
-                    <p:sldTgt/>
-                  </p:tgtEl>
-                </p:cond>
-              </p:prevCondLst>
-              <p:nextCondLst>
-                <p:cond evt="onNext" delay="0">
-                  <p:tgtEl>
-                    <p:sldTgt/>
-                  </p:tgtEl>
-                </p:cond>
-              </p:nextCondLst>
-            </p:seq>
-          </p:childTnLst>
-        </p:cTn>
-      </p:par>
-    </p:tnLst>
-  </p:timing>
 </p:sld>
 </file>
 
